--- a/Collaterals/IntelMakersESP32course - class 3.pptx
+++ b/Collaterals/IntelMakersESP32course - class 3.pptx
@@ -259,7 +259,7 @@
                 <a:latin typeface="Intel Clear"/>
               </a:rPr>
               <a:pPr/>
-              <a:t>21-Jun-21</a:t>
+              <a:t>5/15/2024</a:t>
             </a:fld>
             <a:endParaRPr lang="en-US" dirty="0">
               <a:latin typeface="Intel Clear"/>
@@ -439,7 +439,7 @@
             <a:fld id="{ED7FC5FE-6F0D-D34A-8EE6-C95B4F5F4DC8}" type="datetimeFigureOut">
               <a:rPr lang="en-US" smtClean="0"/>
               <a:pPr/>
-              <a:t>21-Jun-21</a:t>
+              <a:t>5/15/2024</a:t>
             </a:fld>
             <a:endParaRPr lang="en-US" dirty="0"/>
           </a:p>
@@ -981,7 +981,7 @@
           <a:noFill/>
           <a:extLst>
             <a:ext uri="{909E8E84-426E-40dd-AFC4-6F175D3DCCD1}">
-              <a14:hiddenFill xmlns="" xmlns:a14="http://schemas.microsoft.com/office/drawing/2010/main">
+              <a14:hiddenFill xmlns:a14="http://schemas.microsoft.com/office/drawing/2010/main" xmlns="">
                 <a:solidFill>
                   <a:srgbClr val="FFFFFF"/>
                 </a:solidFill>
@@ -3855,7 +3855,7 @@
           <a:noFill/>
           <a:extLst>
             <a:ext uri="{909E8E84-426E-40dd-AFC4-6F175D3DCCD1}">
-              <a14:hiddenFill xmlns="" xmlns:a14="http://schemas.microsoft.com/office/drawing/2010/main">
+              <a14:hiddenFill xmlns:a14="http://schemas.microsoft.com/office/drawing/2010/main" xmlns="">
                 <a:solidFill>
                   <a:srgbClr val="FFFFFF"/>
                 </a:solidFill>
@@ -4024,7 +4024,7 @@
           <a:noFill/>
           <a:extLst>
             <a:ext uri="{909E8E84-426E-40dd-AFC4-6F175D3DCCD1}">
-              <a14:hiddenFill xmlns="" xmlns:a14="http://schemas.microsoft.com/office/drawing/2010/main">
+              <a14:hiddenFill xmlns:a14="http://schemas.microsoft.com/office/drawing/2010/main" xmlns="">
                 <a:solidFill>
                   <a:srgbClr val="FFFFFF"/>
                 </a:solidFill>
@@ -4419,7 +4419,7 @@
           <a:noFill/>
           <a:extLst>
             <a:ext uri="{909E8E84-426E-40dd-AFC4-6F175D3DCCD1}">
-              <a14:hiddenFill xmlns="" xmlns:a14="http://schemas.microsoft.com/office/drawing/2010/main">
+              <a14:hiddenFill xmlns:a14="http://schemas.microsoft.com/office/drawing/2010/main" xmlns="">
                 <a:solidFill>
                   <a:srgbClr val="FFFFFF"/>
                 </a:solidFill>
@@ -4722,7 +4722,7 @@
           <a:noFill/>
           <a:extLst>
             <a:ext uri="{909E8E84-426E-40dd-AFC4-6F175D3DCCD1}">
-              <a14:hiddenFill xmlns="" xmlns:a14="http://schemas.microsoft.com/office/drawing/2010/main">
+              <a14:hiddenFill xmlns:a14="http://schemas.microsoft.com/office/drawing/2010/main" xmlns="">
                 <a:solidFill>
                   <a:srgbClr val="FFFFFF"/>
                 </a:solidFill>
@@ -5058,7 +5058,7 @@
           <a:noFill/>
           <a:extLst>
             <a:ext uri="{909E8E84-426E-40dd-AFC4-6F175D3DCCD1}">
-              <a14:hiddenFill xmlns="" xmlns:a14="http://schemas.microsoft.com/office/drawing/2010/main">
+              <a14:hiddenFill xmlns:a14="http://schemas.microsoft.com/office/drawing/2010/main" xmlns="">
                 <a:solidFill>
                   <a:srgbClr val="FFFFFF"/>
                 </a:solidFill>
@@ -9274,7 +9274,7 @@
           <a:noFill/>
           <a:extLst>
             <a:ext uri="{909E8E84-426E-40dd-AFC4-6F175D3DCCD1}">
-              <a14:hiddenFill xmlns="" xmlns:a14="http://schemas.microsoft.com/office/drawing/2010/main">
+              <a14:hiddenFill xmlns:a14="http://schemas.microsoft.com/office/drawing/2010/main" xmlns="">
                 <a:solidFill>
                   <a:srgbClr val="FFFFFF"/>
                 </a:solidFill>
@@ -9518,7 +9518,7 @@
           <a:noFill/>
           <a:extLst>
             <a:ext uri="{909E8E84-426E-40dd-AFC4-6F175D3DCCD1}">
-              <a14:hiddenFill xmlns="" xmlns:a14="http://schemas.microsoft.com/office/drawing/2010/main">
+              <a14:hiddenFill xmlns:a14="http://schemas.microsoft.com/office/drawing/2010/main" xmlns="">
                 <a:solidFill>
                   <a:srgbClr val="FFFFFF"/>
                 </a:solidFill>
@@ -10943,7 +10943,7 @@
           <a:noFill/>
           <a:extLst>
             <a:ext uri="{909E8E84-426E-40dd-AFC4-6F175D3DCCD1}">
-              <a14:hiddenFill xmlns="" xmlns:a14="http://schemas.microsoft.com/office/drawing/2010/main">
+              <a14:hiddenFill xmlns:a14="http://schemas.microsoft.com/office/drawing/2010/main" xmlns="">
                 <a:solidFill>
                   <a:srgbClr val="FFFFFF"/>
                 </a:solidFill>
@@ -11560,7 +11560,7 @@
           <a:noFill/>
           <a:extLst>
             <a:ext uri="{909E8E84-426E-40dd-AFC4-6F175D3DCCD1}">
-              <a14:hiddenFill xmlns="" xmlns:a14="http://schemas.microsoft.com/office/drawing/2010/main">
+              <a14:hiddenFill xmlns:a14="http://schemas.microsoft.com/office/drawing/2010/main" xmlns="">
                 <a:solidFill>
                   <a:srgbClr val="FFFFFF"/>
                 </a:solidFill>
@@ -12127,7 +12127,12 @@
             <p:ph type="ctrTitle"/>
           </p:nvPr>
         </p:nvSpPr>
-        <p:spPr/>
+        <p:spPr>
+          <a:xfrm>
+            <a:off x="2003980" y="3754769"/>
+            <a:ext cx="8212886" cy="1102519"/>
+          </a:xfrm>
+        </p:spPr>
         <p:txBody>
           <a:bodyPr/>
           <a:lstStyle/>
@@ -12697,7 +12702,7 @@
               </a:spcBef>
             </a:pPr>
             <a:r>
-              <a:rPr lang="en-US" sz="3600" dirty="0"/>
+              <a:rPr lang="en-US" sz="2800" dirty="0"/>
               <a:t>Static Instance VS dynamic allocation (. Vs -&gt;)</a:t>
             </a:r>
           </a:p>
